--- a/slides/workshop-v2.pptx
+++ b/slides/workshop-v2.pptx
@@ -138,7 +138,7 @@
   <p:extLst>
     <p:ext uri="{521415D9-36F7-43E2-AB2F-B90AF26B5E84}">
       <p14:sectionLst xmlns:p14="http://schemas.microsoft.com/office/powerpoint/2010/main">
-        <p14:section name="Abertura" id="{751fa7ac-9b9a-4892-53d2-ba2006be6317}">
+        <p14:section name="Abertura" id="{2f25a567-8a58-25a2-de88-974527ffe25e}">
           <p14:sldIdLst>
             <p14:sldId id="256"/>
             <p14:sldId id="257"/>
@@ -149,7 +149,7 @@
             <p14:sldId id="262"/>
           </p14:sldIdLst>
         </p14:section>
-        <p14:section name="Missões" id="{d20a5eb1-1730-3027-a9c2-e1e34fbae04f}">
+        <p14:section name="Missões" id="{f4c34e8b-848f-8a02-cb46-6c3b03175a32}">
           <p14:sldIdLst>
             <p14:sldId id="263"/>
             <p14:sldId id="264"/>
@@ -161,7 +161,7 @@
             <p14:sldId id="270"/>
           </p14:sldIdLst>
         </p14:section>
-        <p14:section name="Projeto 1" id="{9fb6d271-caa1-13b5-9edb-16921f32287f}">
+        <p14:section name="Projeto 1" id="{8d8c6cd0-9b9d-9312-afcb-04b7b581d54e}">
           <p14:sldIdLst>
             <p14:sldId id="271"/>
             <p14:sldId id="272"/>
@@ -173,7 +173,7 @@
             <p14:sldId id="278"/>
           </p14:sldIdLst>
         </p14:section>
-        <p14:section name="Projeto 2" id="{61fecb9e-0d4c-960b-32e5-95aecad49354}">
+        <p14:section name="Projeto 2" id="{bef2874f-dd72-ef9b-e0eb-1e93b526acaf}">
           <p14:sldIdLst>
             <p14:sldId id="279"/>
             <p14:sldId id="280"/>
@@ -184,7 +184,7 @@
             <p14:sldId id="285"/>
           </p14:sldIdLst>
         </p14:section>
-        <p14:section name="Fecho" id="{a8cae861-0743-fa5c-e66b-0e6831285dd5}">
+        <p14:section name="Fecho" id="{618381a8-f11e-e7a0-1e26-2f2f7b690adc}">
           <p14:sldIdLst>
             <p14:sldId id="286"/>
             <p14:sldId id="287"/>
@@ -2153,6 +2153,7 @@
 - O caminho por defeito é a Biblioteca Municipal, sem login; quem tiver Jira ou GitHub a funcionar pode usar uma issue sua.
 Olha para o painel:
 - O funil está vazio: "daqui a 30 minutos queremos a sala toda no fim".
+- Quem vai trabalhar no seu repositório e prefere que nada saia do portátil: "o unregister para os envios; a caderneta fica, e o register --again volta a ligar".
 Relógio: deves estar aqui aos 50 min.</a:t>
             </a:r>
             <a:endParaRPr lang="en-US" dirty="0"/>
@@ -5935,7 +5936,7 @@
         <p:spPr>
           <a:xfrm>
             <a:off x="640080" y="5989320"/>
-            <a:ext cx="10911535" cy="1954073"/>
+            <a:ext cx="10911535" cy="1561795"/>
           </a:xfrm>
           <a:prstGeom prst="rect">
             <a:avLst/>
@@ -5999,7 +6000,7 @@
         <p:spPr>
           <a:xfrm>
             <a:off x="914400" y="6629400"/>
-            <a:ext cx="10362895" cy="1176833"/>
+            <a:ext cx="10362895" cy="784555"/>
           </a:xfrm>
           <a:prstGeom prst="rect">
             <a:avLst/>
@@ -6015,7 +6016,7 @@
               <a:buNone/>
             </a:pPr>
             <a:r>
-              <a:rPr lang="en-US" sz="2200" dirty="0">
+              <a:rPr lang="en-US" sz="2100" dirty="0">
                 <a:solidFill>
                   <a:srgbClr val="FCF9FE"/>
                 </a:solidFill>
@@ -6025,7 +6026,7 @@
               </a:rPr>
               <a:t>Usa um subagente Explore para listar as funções de src/units.js que não têm teste.</a:t>
             </a:r>
-            <a:endParaRPr lang="en-US" sz="2200" dirty="0"/>
+            <a:endParaRPr lang="en-US" sz="2100" dirty="0"/>
           </a:p>
         </p:txBody>
       </p:sp>
@@ -6802,7 +6803,7 @@
               <a:buNone/>
             </a:pPr>
             <a:r>
-              <a:rPr lang="en-US" sz="2000" dirty="0">
+              <a:rPr lang="en-US" sz="2100" dirty="0">
                 <a:solidFill>
                   <a:srgbClr val="FCF9FE"/>
                 </a:solidFill>
@@ -6812,14 +6813,14 @@
               </a:rPr>
               <a:t>Cria .claude/skills/resumo/SKILL.md: resume um ficheiro em 3 linhas</a:t>
             </a:r>
-            <a:endParaRPr lang="en-US" sz="2000" dirty="0"/>
-          </a:p>
-          <a:p>
-            <a:pPr indent="0" marL="0">
-              <a:buNone/>
-            </a:pPr>
-            <a:r>
-              <a:rPr lang="en-US" sz="2000" dirty="0">
+            <a:endParaRPr lang="en-US" sz="2100" dirty="0"/>
+          </a:p>
+          <a:p>
+            <a:pPr indent="0" marL="0">
+              <a:buNone/>
+            </a:pPr>
+            <a:r>
+              <a:rPr lang="en-US" sz="2100" dirty="0">
                 <a:solidFill>
                   <a:srgbClr val="FCF9FE"/>
                 </a:solidFill>
@@ -6829,14 +6830,14 @@
               </a:rPr>
               <a:t>/exit</a:t>
             </a:r>
-            <a:endParaRPr lang="en-US" sz="2000" dirty="0"/>
-          </a:p>
-          <a:p>
-            <a:pPr indent="0" marL="0">
-              <a:buNone/>
-            </a:pPr>
-            <a:r>
-              <a:rPr lang="en-US" sz="2000" dirty="0">
+            <a:endParaRPr lang="en-US" sz="2100" dirty="0"/>
+          </a:p>
+          <a:p>
+            <a:pPr indent="0" marL="0">
+              <a:buNone/>
+            </a:pPr>
+            <a:r>
+              <a:rPr lang="en-US" sz="2100" dirty="0">
                 <a:solidFill>
                   <a:srgbClr val="FCF9FE"/>
                 </a:solidFill>
@@ -6846,14 +6847,14 @@
               </a:rPr>
               <a:t>claude -c</a:t>
             </a:r>
-            <a:endParaRPr lang="en-US" sz="2000" dirty="0"/>
-          </a:p>
-          <a:p>
-            <a:pPr indent="0" marL="0">
-              <a:buNone/>
-            </a:pPr>
-            <a:r>
-              <a:rPr lang="en-US" sz="2000" dirty="0">
+            <a:endParaRPr lang="en-US" sz="2100" dirty="0"/>
+          </a:p>
+          <a:p>
+            <a:pPr indent="0" marL="0">
+              <a:buNone/>
+            </a:pPr>
+            <a:r>
+              <a:rPr lang="en-US" sz="2100" dirty="0">
                 <a:solidFill>
                   <a:srgbClr val="FCF9FE"/>
                 </a:solidFill>
@@ -6863,7 +6864,7 @@
               </a:rPr>
               <a:t>/resumo src/units.js</a:t>
             </a:r>
-            <a:endParaRPr lang="en-US" sz="2000" dirty="0"/>
+            <a:endParaRPr lang="en-US" sz="2100" dirty="0"/>
           </a:p>
         </p:txBody>
       </p:sp>
@@ -7560,7 +7561,7 @@
         <p:spPr>
           <a:xfrm>
             <a:off x="640080" y="5989320"/>
-            <a:ext cx="10911535" cy="2346350"/>
+            <a:ext cx="10911535" cy="1954073"/>
           </a:xfrm>
           <a:prstGeom prst="rect">
             <a:avLst/>
@@ -7624,7 +7625,7 @@
         <p:spPr>
           <a:xfrm>
             <a:off x="914400" y="6629400"/>
-            <a:ext cx="10362895" cy="1569110"/>
+            <a:ext cx="10362895" cy="1176833"/>
           </a:xfrm>
           <a:prstGeom prst="rect">
             <a:avLst/>
@@ -7640,7 +7641,7 @@
               <a:buNone/>
             </a:pPr>
             <a:r>
-              <a:rPr lang="en-US" sz="2100" dirty="0">
+              <a:rPr lang="en-US" sz="2200" dirty="0">
                 <a:solidFill>
                   <a:srgbClr val="FCF9FE"/>
                 </a:solidFill>
@@ -7650,14 +7651,14 @@
               </a:rPr>
               <a:t>Acrescenta em .claude/settings.local.json um hook PostToolUse (Edit|Write) que junta a hora e o ficheiro a edits.log.</a:t>
             </a:r>
-            <a:endParaRPr lang="en-US" sz="2100" dirty="0"/>
-          </a:p>
-          <a:p>
-            <a:pPr indent="0" marL="0">
-              <a:buNone/>
-            </a:pPr>
-            <a:r>
-              <a:rPr lang="en-US" sz="2100" dirty="0">
+            <a:endParaRPr lang="en-US" sz="2200" dirty="0"/>
+          </a:p>
+          <a:p>
+            <a:pPr indent="0" marL="0">
+              <a:buNone/>
+            </a:pPr>
+            <a:r>
+              <a:rPr lang="en-US" sz="2200" dirty="0">
                 <a:solidFill>
                   <a:srgbClr val="FCF9FE"/>
                 </a:solidFill>
@@ -7667,7 +7668,7 @@
               </a:rPr>
               <a:t>Acrescenta um comentário no topo do README.md.</a:t>
             </a:r>
-            <a:endParaRPr lang="en-US" sz="2100" dirty="0"/>
+            <a:endParaRPr lang="en-US" sz="2200" dirty="0"/>
           </a:p>
         </p:txBody>
       </p:sp>
@@ -8364,7 +8365,7 @@
         <p:spPr>
           <a:xfrm>
             <a:off x="640080" y="5989320"/>
-            <a:ext cx="10911535" cy="1954073"/>
+            <a:ext cx="10911535" cy="1561795"/>
           </a:xfrm>
           <a:prstGeom prst="rect">
             <a:avLst/>
@@ -8428,7 +8429,7 @@
         <p:spPr>
           <a:xfrm>
             <a:off x="914400" y="6629400"/>
-            <a:ext cx="10362895" cy="1176833"/>
+            <a:ext cx="10362895" cy="784555"/>
           </a:xfrm>
           <a:prstGeom prst="rect">
             <a:avLst/>
@@ -8444,7 +8445,7 @@
               <a:buNone/>
             </a:pPr>
             <a:r>
-              <a:rPr lang="en-US" sz="2200" dirty="0">
+              <a:rPr lang="en-US" sz="2100" dirty="0">
                 <a:solidFill>
                   <a:srgbClr val="FCF9FE"/>
                 </a:solidFill>
@@ -8454,7 +8455,7 @@
               </a:rPr>
               <a:t>/loop 1m corre npm test e corrige o primeiro teste vermelho; quando estiver tudo verde, para o loop</a:t>
             </a:r>
-            <a:endParaRPr lang="en-US" sz="2200" dirty="0"/>
+            <a:endParaRPr lang="en-US" sz="2100" dirty="0"/>
           </a:p>
         </p:txBody>
       </p:sp>
@@ -8785,7 +8786,7 @@
         </p:nvSpPr>
         <p:spPr>
           <a:xfrm>
-            <a:off x="640080" y="2651760"/>
+            <a:off x="640080" y="2834640"/>
             <a:ext cx="8899855" cy="1645920"/>
           </a:xfrm>
           <a:prstGeom prst="rect">
@@ -8824,7 +8825,7 @@
         </p:nvSpPr>
         <p:spPr>
           <a:xfrm>
-            <a:off x="10271455" y="2697480"/>
+            <a:off x="10271455" y="2880360"/>
             <a:ext cx="1280160" cy="1280160"/>
           </a:xfrm>
           <a:prstGeom prst="ellipse">
@@ -8857,7 +8858,7 @@
         </p:blipFill>
         <p:spPr>
           <a:xfrm>
-            <a:off x="10553090" y="2979115"/>
+            <a:off x="10553090" y="3161995"/>
             <a:ext cx="716890" cy="716890"/>
           </a:xfrm>
           <a:prstGeom prst="rect">
@@ -8873,7 +8874,7 @@
         </p:nvSpPr>
         <p:spPr>
           <a:xfrm>
-            <a:off x="9539935" y="4069080"/>
+            <a:off x="9539935" y="4251960"/>
             <a:ext cx="2011680" cy="822960"/>
           </a:xfrm>
           <a:prstGeom prst="rect">
@@ -8912,7 +8913,7 @@
         </p:nvSpPr>
         <p:spPr>
           <a:xfrm>
-            <a:off x="640080" y="4572000"/>
+            <a:off x="640080" y="4663440"/>
             <a:ext cx="8899855" cy="950976"/>
           </a:xfrm>
           <a:prstGeom prst="rect">
@@ -9322,7 +9323,7 @@
         </p:nvSpPr>
         <p:spPr>
           <a:xfrm>
-            <a:off x="640080" y="2651760"/>
+            <a:off x="640080" y="2331720"/>
             <a:ext cx="8899855" cy="3108960"/>
           </a:xfrm>
           <a:prstGeom prst="rect">
@@ -9361,7 +9362,7 @@
         </p:nvSpPr>
         <p:spPr>
           <a:xfrm>
-            <a:off x="10271455" y="2697480"/>
+            <a:off x="10271455" y="2377440"/>
             <a:ext cx="1280160" cy="1280160"/>
           </a:xfrm>
           <a:prstGeom prst="ellipse">
@@ -9394,7 +9395,7 @@
         </p:blipFill>
         <p:spPr>
           <a:xfrm>
-            <a:off x="10553090" y="2979115"/>
+            <a:off x="10553090" y="2659075"/>
             <a:ext cx="716890" cy="716890"/>
           </a:xfrm>
           <a:prstGeom prst="rect">
@@ -9410,7 +9411,7 @@
         </p:nvSpPr>
         <p:spPr>
           <a:xfrm>
-            <a:off x="9539935" y="4069080"/>
+            <a:off x="9539935" y="3749040"/>
             <a:ext cx="2011680" cy="822960"/>
           </a:xfrm>
           <a:prstGeom prst="rect">
@@ -9449,7 +9450,7 @@
         </p:nvSpPr>
         <p:spPr>
           <a:xfrm>
-            <a:off x="640080" y="6035040"/>
+            <a:off x="640080" y="5623560"/>
             <a:ext cx="8899855" cy="1380744"/>
           </a:xfrm>
           <a:prstGeom prst="rect">
@@ -9488,7 +9489,7 @@
         </p:nvSpPr>
         <p:spPr>
           <a:xfrm>
-            <a:off x="640080" y="7735824"/>
+            <a:off x="640080" y="7232904"/>
             <a:ext cx="10911535" cy="1561795"/>
           </a:xfrm>
           <a:prstGeom prst="rect">
@@ -9513,7 +9514,7 @@
         </p:nvSpPr>
         <p:spPr>
           <a:xfrm>
-            <a:off x="914400" y="7918704"/>
+            <a:off x="914400" y="7415784"/>
             <a:ext cx="10362895" cy="365760"/>
           </a:xfrm>
           <a:prstGeom prst="rect">
@@ -9552,7 +9553,7 @@
         </p:nvSpPr>
         <p:spPr>
           <a:xfrm>
-            <a:off x="914400" y="8375904"/>
+            <a:off x="914400" y="7872984"/>
             <a:ext cx="10362895" cy="784555"/>
           </a:xfrm>
           <a:prstGeom prst="rect">
@@ -13612,7 +13613,7 @@
         <p:spPr>
           <a:xfrm>
             <a:off x="640080" y="4535424"/>
-            <a:ext cx="5318608" cy="2738628"/>
+            <a:ext cx="5318608" cy="2346350"/>
           </a:xfrm>
           <a:prstGeom prst="rect">
             <a:avLst/>
@@ -13676,7 +13677,7 @@
         <p:spPr>
           <a:xfrm>
             <a:off x="914400" y="5175504"/>
-            <a:ext cx="4769968" cy="1961388"/>
+            <a:ext cx="4769968" cy="1569110"/>
           </a:xfrm>
           <a:prstGeom prst="rect">
             <a:avLst/>
@@ -13715,7 +13716,7 @@
         <p:spPr>
           <a:xfrm>
             <a:off x="6233008" y="4535424"/>
-            <a:ext cx="5318608" cy="2738628"/>
+            <a:ext cx="5318608" cy="2346350"/>
           </a:xfrm>
           <a:prstGeom prst="rect">
             <a:avLst/>
@@ -13779,7 +13780,7 @@
         <p:spPr>
           <a:xfrm>
             <a:off x="6507328" y="5175504"/>
-            <a:ext cx="4769968" cy="1961388"/>
+            <a:ext cx="4769968" cy="1569110"/>
           </a:xfrm>
           <a:prstGeom prst="rect">
             <a:avLst/>
@@ -13795,7 +13796,7 @@
               <a:buNone/>
             </a:pPr>
             <a:r>
-              <a:rPr lang="en-US" sz="2200" dirty="0">
+              <a:rPr lang="en-US" sz="2100" dirty="0">
                 <a:solidFill>
                   <a:srgbClr val="FCF9FE"/>
                 </a:solidFill>
@@ -13805,14 +13806,14 @@
               </a:rPr>
               <a:t>cd ~/workshop-claude/canivete-project</a:t>
             </a:r>
-            <a:endParaRPr lang="en-US" sz="2200" dirty="0"/>
-          </a:p>
-          <a:p>
-            <a:pPr indent="0" marL="0">
-              <a:buNone/>
-            </a:pPr>
-            <a:r>
-              <a:rPr lang="en-US" sz="2200" dirty="0">
+            <a:endParaRPr lang="en-US" sz="2100" dirty="0"/>
+          </a:p>
+          <a:p>
+            <a:pPr indent="0" marL="0">
+              <a:buNone/>
+            </a:pPr>
+            <a:r>
+              <a:rPr lang="en-US" sz="2100" dirty="0">
                 <a:solidFill>
                   <a:srgbClr val="FCF9FE"/>
                 </a:solidFill>
@@ -13822,14 +13823,14 @@
               </a:rPr>
               <a:t>node server.js</a:t>
             </a:r>
-            <a:endParaRPr lang="en-US" sz="2200" dirty="0"/>
-          </a:p>
-          <a:p>
-            <a:pPr indent="0" marL="0">
-              <a:buNone/>
-            </a:pPr>
-            <a:r>
-              <a:rPr lang="en-US" sz="2200" dirty="0">
+            <a:endParaRPr lang="en-US" sz="2100" dirty="0"/>
+          </a:p>
+          <a:p>
+            <a:pPr indent="0" marL="0">
+              <a:buNone/>
+            </a:pPr>
+            <a:r>
+              <a:rPr lang="en-US" sz="2100" dirty="0">
                 <a:solidFill>
                   <a:srgbClr val="FCF9FE"/>
                 </a:solidFill>
@@ -13839,7 +13840,7 @@
               </a:rPr>
               <a:t>http://localhost:3000/status</a:t>
             </a:r>
-            <a:endParaRPr lang="en-US" sz="2200" dirty="0"/>
+            <a:endParaRPr lang="en-US" sz="2100" dirty="0"/>
           </a:p>
         </p:txBody>
       </p:sp>
@@ -14536,7 +14537,7 @@
         <p:spPr>
           <a:xfrm>
             <a:off x="640080" y="4535424"/>
-            <a:ext cx="5318608" cy="2346350"/>
+            <a:ext cx="5318608" cy="1954073"/>
           </a:xfrm>
           <a:prstGeom prst="rect">
             <a:avLst/>
@@ -14600,7 +14601,7 @@
         <p:spPr>
           <a:xfrm>
             <a:off x="914400" y="5175504"/>
-            <a:ext cx="4769968" cy="1569110"/>
+            <a:ext cx="4769968" cy="1176833"/>
           </a:xfrm>
           <a:prstGeom prst="rect">
             <a:avLst/>
@@ -14639,7 +14640,7 @@
         <p:spPr>
           <a:xfrm>
             <a:off x="6233008" y="4535424"/>
-            <a:ext cx="5318608" cy="2346350"/>
+            <a:ext cx="5318608" cy="1954073"/>
           </a:xfrm>
           <a:prstGeom prst="rect">
             <a:avLst/>
@@ -14703,7 +14704,7 @@
         <p:spPr>
           <a:xfrm>
             <a:off x="6507328" y="5175504"/>
-            <a:ext cx="4769968" cy="1569110"/>
+            <a:ext cx="4769968" cy="1176833"/>
           </a:xfrm>
           <a:prstGeom prst="rect">
             <a:avLst/>
@@ -14719,7 +14720,7 @@
               <a:buNone/>
             </a:pPr>
             <a:r>
-              <a:rPr lang="en-US" sz="2100" dirty="0">
+              <a:rPr lang="en-US" sz="2200" dirty="0">
                 <a:solidFill>
                   <a:srgbClr val="FCF9FE"/>
                 </a:solidFill>
@@ -14729,14 +14730,14 @@
               </a:rPr>
               <a:t>tools/nm-03/spec.md   (acrescenta a regra)</a:t>
             </a:r>
-            <a:endParaRPr lang="en-US" sz="2100" dirty="0"/>
-          </a:p>
-          <a:p>
-            <a:pPr indent="0" marL="0">
-              <a:buNone/>
-            </a:pPr>
-            <a:r>
-              <a:rPr lang="en-US" sz="2100" dirty="0">
+            <a:endParaRPr lang="en-US" sz="2200" dirty="0"/>
+          </a:p>
+          <a:p>
+            <a:pPr indent="0" marL="0">
+              <a:buNone/>
+            </a:pPr>
+            <a:r>
+              <a:rPr lang="en-US" sz="2200" dirty="0">
                 <a:solidFill>
                   <a:srgbClr val="FCF9FE"/>
                 </a:solidFill>
@@ -14746,7 +14747,7 @@
               </a:rPr>
               <a:t>/demo-swarm --retry nm-03</a:t>
             </a:r>
-            <a:endParaRPr lang="en-US" sz="2100" dirty="0"/>
+            <a:endParaRPr lang="en-US" sz="2200" dirty="0"/>
           </a:p>
         </p:txBody>
       </p:sp>
@@ -16619,7 +16620,7 @@
         </p:nvSpPr>
         <p:spPr>
           <a:xfrm>
-            <a:off x="640080" y="2651760"/>
+            <a:off x="640080" y="2331720"/>
             <a:ext cx="8899855" cy="1645920"/>
           </a:xfrm>
           <a:prstGeom prst="rect">
@@ -16658,7 +16659,7 @@
         </p:nvSpPr>
         <p:spPr>
           <a:xfrm>
-            <a:off x="10271455" y="2697480"/>
+            <a:off x="10271455" y="2377440"/>
             <a:ext cx="1280160" cy="1280160"/>
           </a:xfrm>
           <a:prstGeom prst="ellipse">
@@ -16691,7 +16692,7 @@
         </p:blipFill>
         <p:spPr>
           <a:xfrm>
-            <a:off x="10553090" y="2979115"/>
+            <a:off x="10553090" y="2659075"/>
             <a:ext cx="716890" cy="716890"/>
           </a:xfrm>
           <a:prstGeom prst="rect">
@@ -16707,7 +16708,7 @@
         </p:nvSpPr>
         <p:spPr>
           <a:xfrm>
-            <a:off x="9539935" y="4069080"/>
+            <a:off x="9539935" y="3749040"/>
             <a:ext cx="2011680" cy="822960"/>
           </a:xfrm>
           <a:prstGeom prst="rect">
@@ -16746,7 +16747,7 @@
         </p:nvSpPr>
         <p:spPr>
           <a:xfrm>
-            <a:off x="640080" y="4572000"/>
+            <a:off x="640080" y="4160520"/>
             <a:ext cx="8899855" cy="1380744"/>
           </a:xfrm>
           <a:prstGeom prst="rect">
@@ -16785,7 +16786,7 @@
         </p:nvSpPr>
         <p:spPr>
           <a:xfrm>
-            <a:off x="640080" y="6272784"/>
+            <a:off x="640080" y="5769864"/>
             <a:ext cx="10911535" cy="1561795"/>
           </a:xfrm>
           <a:prstGeom prst="rect">
@@ -16810,7 +16811,7 @@
         </p:nvSpPr>
         <p:spPr>
           <a:xfrm>
-            <a:off x="914400" y="6455664"/>
+            <a:off x="914400" y="5952744"/>
             <a:ext cx="10362895" cy="365760"/>
           </a:xfrm>
           <a:prstGeom prst="rect">
@@ -16849,7 +16850,7 @@
         </p:nvSpPr>
         <p:spPr>
           <a:xfrm>
-            <a:off x="914400" y="6912864"/>
+            <a:off x="914400" y="6409944"/>
             <a:ext cx="10362895" cy="784555"/>
           </a:xfrm>
           <a:prstGeom prst="rect">
@@ -16894,6 +16895,126 @@
               <a:t>claude</a:t>
             </a:r>
             <a:endParaRPr lang="en-US" sz="2100" dirty="0"/>
+          </a:p>
+        </p:txBody>
+      </p:sp>
+      <p:sp>
+        <p:nvSpPr>
+          <p:cNvPr id="14" name="code-background"/>
+          <p:cNvSpPr/>
+          <p:nvPr/>
+        </p:nvSpPr>
+        <p:spPr>
+          <a:xfrm>
+            <a:off x="640080" y="7560259"/>
+            <a:ext cx="10911535" cy="1561795"/>
+          </a:xfrm>
+          <a:prstGeom prst="rect">
+            <a:avLst/>
+          </a:prstGeom>
+          <a:solidFill>
+            <a:srgbClr val="140920"/>
+          </a:solidFill>
+          <a:ln w="12700">
+            <a:solidFill>
+              <a:srgbClr val="140920"/>
+            </a:solidFill>
+            <a:prstDash val="solid"/>
+          </a:ln>
+        </p:spPr>
+      </p:sp>
+      <p:sp>
+        <p:nvSpPr>
+          <p:cNvPr id="15" name="code-label"/>
+          <p:cNvSpPr txBox="1"/>
+          <p:nvPr/>
+        </p:nvSpPr>
+        <p:spPr>
+          <a:xfrm>
+            <a:off x="914400" y="7743139"/>
+            <a:ext cx="10362895" cy="365760"/>
+          </a:xfrm>
+          <a:prstGeom prst="rect">
+            <a:avLst/>
+          </a:prstGeom>
+          <a:noFill/>
+          <a:ln/>
+        </p:spPr>
+        <p:txBody>
+          <a:bodyPr wrap="square" lIns="0" tIns="0" rIns="0" bIns="0" rtlCol="0" anchor="t"/>
+          <a:lstStyle/>
+          <a:p>
+            <a:pPr indent="0" marL="0">
+              <a:buNone/>
+            </a:pPr>
+            <a:r>
+              <a:rPr lang="en-US" sz="2000" b="1" dirty="0">
+                <a:solidFill>
+                  <a:srgbClr val="93A7FF"/>
+                </a:solidFill>
+                <a:latin typeface="Arial" pitchFamily="34" charset="0"/>
+                <a:ea typeface="Arial" pitchFamily="34" charset="-122"/>
+                <a:cs typeface="Arial" pitchFamily="34" charset="-120"/>
+              </a:rPr>
+              <a:t>Opcional · deixar de enviar ao painel</a:t>
+            </a:r>
+            <a:endParaRPr lang="en-US" sz="2000" dirty="0"/>
+          </a:p>
+        </p:txBody>
+      </p:sp>
+      <p:sp>
+        <p:nvSpPr>
+          <p:cNvPr id="16" name="code"/>
+          <p:cNvSpPr txBox="1"/>
+          <p:nvPr/>
+        </p:nvSpPr>
+        <p:spPr>
+          <a:xfrm>
+            <a:off x="914400" y="8200339"/>
+            <a:ext cx="10362895" cy="784555"/>
+          </a:xfrm>
+          <a:prstGeom prst="rect">
+            <a:avLst/>
+          </a:prstGeom>
+          <a:noFill/>
+          <a:ln/>
+        </p:spPr>
+        <p:txBody>
+          <a:bodyPr wrap="square" lIns="0" tIns="0" rIns="0" bIns="0" rtlCol="0" anchor="t"/>
+          <a:lstStyle/>
+          <a:p>
+            <a:pPr indent="0" marL="0">
+              <a:buNone/>
+            </a:pPr>
+            <a:r>
+              <a:rPr lang="en-US" sz="2200" dirty="0">
+                <a:solidFill>
+                  <a:srgbClr val="FCF9FE"/>
+                </a:solidFill>
+                <a:latin typeface="Courier New" pitchFamily="34" charset="0"/>
+                <a:ea typeface="Courier New" pitchFamily="34" charset="-122"/>
+                <a:cs typeface="Courier New" pitchFamily="34" charset="-120"/>
+              </a:rPr>
+              <a:t>cd "$HOME/.workshop-claude/kit/telemetry"</a:t>
+            </a:r>
+            <a:endParaRPr lang="en-US" sz="2200" dirty="0"/>
+          </a:p>
+          <a:p>
+            <a:pPr indent="0" marL="0">
+              <a:buNone/>
+            </a:pPr>
+            <a:r>
+              <a:rPr lang="en-US" sz="2200" dirty="0">
+                <a:solidFill>
+                  <a:srgbClr val="FCF9FE"/>
+                </a:solidFill>
+                <a:latin typeface="Courier New" pitchFamily="34" charset="0"/>
+                <a:ea typeface="Courier New" pitchFamily="34" charset="-122"/>
+                <a:cs typeface="Courier New" pitchFamily="34" charset="-120"/>
+              </a:rPr>
+              <a:t>node ctl.mjs unregister</a:t>
+            </a:r>
+            <a:endParaRPr lang="en-US" sz="2200" dirty="0"/>
           </a:p>
         </p:txBody>
       </p:sp>
@@ -17375,7 +17496,7 @@
         <p:spPr>
           <a:xfrm>
             <a:off x="640080" y="4535424"/>
-            <a:ext cx="5318608" cy="1954073"/>
+            <a:ext cx="5318608" cy="1561795"/>
           </a:xfrm>
           <a:prstGeom prst="rect">
             <a:avLst/>
@@ -17439,7 +17560,7 @@
         <p:spPr>
           <a:xfrm>
             <a:off x="914400" y="5175504"/>
-            <a:ext cx="4769968" cy="1176833"/>
+            <a:ext cx="4769968" cy="784555"/>
           </a:xfrm>
           <a:prstGeom prst="rect">
             <a:avLst/>
@@ -17455,7 +17576,7 @@
               <a:buNone/>
             </a:pPr>
             <a:r>
-              <a:rPr lang="en-US" sz="2200" dirty="0">
+              <a:rPr lang="en-US" sz="2100" dirty="0">
                 <a:solidFill>
                   <a:srgbClr val="FCF9FE"/>
                 </a:solidFill>
@@ -17465,7 +17586,7 @@
               </a:rPr>
               <a:t>/task-intake issues/EX-1.json</a:t>
             </a:r>
-            <a:endParaRPr lang="en-US" sz="2200" dirty="0"/>
+            <a:endParaRPr lang="en-US" sz="2100" dirty="0"/>
           </a:p>
         </p:txBody>
       </p:sp>
@@ -17478,7 +17599,7 @@
         <p:spPr>
           <a:xfrm>
             <a:off x="6233008" y="4535424"/>
-            <a:ext cx="5318608" cy="1954073"/>
+            <a:ext cx="5318608" cy="1561795"/>
           </a:xfrm>
           <a:prstGeom prst="rect">
             <a:avLst/>
@@ -17542,7 +17663,7 @@
         <p:spPr>
           <a:xfrm>
             <a:off x="6507328" y="5175504"/>
-            <a:ext cx="4769968" cy="1176833"/>
+            <a:ext cx="4769968" cy="784555"/>
           </a:xfrm>
           <a:prstGeom prst="rect">
             <a:avLst/>
@@ -22629,7 +22750,7 @@
         </p:nvSpPr>
         <p:spPr>
           <a:xfrm>
-            <a:off x="640080" y="2651760"/>
+            <a:off x="640080" y="2834640"/>
             <a:ext cx="8899855" cy="1645920"/>
           </a:xfrm>
           <a:prstGeom prst="rect">
@@ -22668,7 +22789,7 @@
         </p:nvSpPr>
         <p:spPr>
           <a:xfrm>
-            <a:off x="10271455" y="2697480"/>
+            <a:off x="10271455" y="2880360"/>
             <a:ext cx="1280160" cy="1280160"/>
           </a:xfrm>
           <a:prstGeom prst="ellipse">
@@ -22701,7 +22822,7 @@
         </p:blipFill>
         <p:spPr>
           <a:xfrm>
-            <a:off x="10553090" y="2979115"/>
+            <a:off x="10553090" y="3161995"/>
             <a:ext cx="716890" cy="716890"/>
           </a:xfrm>
           <a:prstGeom prst="rect">
@@ -22717,7 +22838,7 @@
         </p:nvSpPr>
         <p:spPr>
           <a:xfrm>
-            <a:off x="9539935" y="4069080"/>
+            <a:off x="9539935" y="4251960"/>
             <a:ext cx="2011680" cy="822960"/>
           </a:xfrm>
           <a:prstGeom prst="rect">
@@ -22756,7 +22877,7 @@
         </p:nvSpPr>
         <p:spPr>
           <a:xfrm>
-            <a:off x="640080" y="4572000"/>
+            <a:off x="640080" y="4663440"/>
             <a:ext cx="7315200" cy="502920"/>
           </a:xfrm>
           <a:prstGeom prst="rect">
@@ -22795,7 +22916,7 @@
         </p:nvSpPr>
         <p:spPr>
           <a:xfrm>
-            <a:off x="640080" y="5303520"/>
+            <a:off x="640080" y="5394960"/>
             <a:ext cx="548640" cy="548640"/>
           </a:xfrm>
           <a:prstGeom prst="ellipse">
@@ -22840,7 +22961,7 @@
         </p:nvSpPr>
         <p:spPr>
           <a:xfrm>
-            <a:off x="1417320" y="5303520"/>
+            <a:off x="1417320" y="5394960"/>
             <a:ext cx="10134295" cy="548640"/>
           </a:xfrm>
           <a:prstGeom prst="rect">
@@ -22879,7 +23000,7 @@
         </p:nvSpPr>
         <p:spPr>
           <a:xfrm>
-            <a:off x="640080" y="6172200"/>
+            <a:off x="640080" y="6263640"/>
             <a:ext cx="548640" cy="548640"/>
           </a:xfrm>
           <a:prstGeom prst="ellipse">
@@ -22924,7 +23045,7 @@
         </p:nvSpPr>
         <p:spPr>
           <a:xfrm>
-            <a:off x="1417320" y="6172200"/>
+            <a:off x="1417320" y="6263640"/>
             <a:ext cx="10134295" cy="548640"/>
           </a:xfrm>
           <a:prstGeom prst="rect">
@@ -22963,7 +23084,7 @@
         </p:nvSpPr>
         <p:spPr>
           <a:xfrm>
-            <a:off x="640080" y="7040880"/>
+            <a:off x="640080" y="7132320"/>
             <a:ext cx="548640" cy="548640"/>
           </a:xfrm>
           <a:prstGeom prst="ellipse">
@@ -23008,7 +23129,7 @@
         </p:nvSpPr>
         <p:spPr>
           <a:xfrm>
-            <a:off x="1417320" y="7040880"/>
+            <a:off x="1417320" y="7132320"/>
             <a:ext cx="10134295" cy="548640"/>
           </a:xfrm>
           <a:prstGeom prst="rect">
@@ -25260,7 +25381,7 @@
         <p:spPr>
           <a:xfrm>
             <a:off x="640080" y="5229454"/>
-            <a:ext cx="10911535" cy="1954073"/>
+            <a:ext cx="10911535" cy="1561795"/>
           </a:xfrm>
           <a:prstGeom prst="rect">
             <a:avLst/>
@@ -25324,7 +25445,7 @@
         <p:spPr>
           <a:xfrm>
             <a:off x="914400" y="5869534"/>
-            <a:ext cx="10362895" cy="1176833"/>
+            <a:ext cx="10362895" cy="784555"/>
           </a:xfrm>
           <a:prstGeom prst="rect">
             <a:avLst/>
@@ -25340,7 +25461,7 @@
               <a:buNone/>
             </a:pPr>
             <a:r>
-              <a:rPr lang="en-US" sz="2200" dirty="0">
+              <a:rPr lang="en-US" sz="2100" dirty="0">
                 <a:solidFill>
                   <a:srgbClr val="FCF9FE"/>
                 </a:solidFill>
@@ -25350,7 +25471,7 @@
               </a:rPr>
               <a:t>powershell -NoProfile -ExecutionPolicy Bypass -File "$env:USERPROFILE\.workshop-claude\setup-windows.ps1" -Check</a:t>
             </a:r>
-            <a:endParaRPr lang="en-US" sz="2200" dirty="0"/>
+            <a:endParaRPr lang="en-US" sz="2100" dirty="0"/>
           </a:p>
         </p:txBody>
       </p:sp>
@@ -25362,7 +25483,7 @@
         </p:nvSpPr>
         <p:spPr>
           <a:xfrm>
-            <a:off x="640080" y="7366406"/>
+            <a:off x="640080" y="6974129"/>
             <a:ext cx="10911535" cy="1169518"/>
           </a:xfrm>
           <a:prstGeom prst="rect">
@@ -25387,7 +25508,7 @@
         </p:nvSpPr>
         <p:spPr>
           <a:xfrm>
-            <a:off x="914400" y="7549286"/>
+            <a:off x="914400" y="7157009"/>
             <a:ext cx="10362895" cy="365760"/>
           </a:xfrm>
           <a:prstGeom prst="rect">
@@ -25426,7 +25547,7 @@
         </p:nvSpPr>
         <p:spPr>
           <a:xfrm>
-            <a:off x="914400" y="8006486"/>
+            <a:off x="914400" y="7614209"/>
             <a:ext cx="10362895" cy="392278"/>
           </a:xfrm>
           <a:prstGeom prst="rect">
@@ -25443,7 +25564,7 @@
               <a:buNone/>
             </a:pPr>
             <a:r>
-              <a:rPr lang="en-US" sz="2200" dirty="0">
+              <a:rPr lang="en-US" sz="2100" dirty="0">
                 <a:solidFill>
                   <a:srgbClr val="FCF9FE"/>
                 </a:solidFill>
@@ -25453,7 +25574,7 @@
               </a:rPr>
               <a:t>node "$HOME/.workshop-claude/kit/telemetry/ctl.mjs" register</a:t>
             </a:r>
-            <a:endParaRPr lang="en-US" sz="2200" dirty="0"/>
+            <a:endParaRPr lang="en-US" sz="2100" dirty="0"/>
           </a:p>
         </p:txBody>
       </p:sp>
@@ -25465,7 +25586,7 @@
         </p:nvSpPr>
         <p:spPr>
           <a:xfrm>
-            <a:off x="640080" y="8810244"/>
+            <a:off x="640080" y="8700516"/>
             <a:ext cx="502920" cy="502920"/>
           </a:xfrm>
           <a:prstGeom prst="ellipse">
@@ -25498,7 +25619,7 @@
         </p:blipFill>
         <p:spPr>
           <a:xfrm>
-            <a:off x="750722" y="8920886"/>
+            <a:off x="750722" y="8811158"/>
             <a:ext cx="281635" cy="281635"/>
           </a:xfrm>
           <a:prstGeom prst="rect">
@@ -25514,8 +25635,8 @@
         </p:nvSpPr>
         <p:spPr>
           <a:xfrm>
-            <a:off x="1371600" y="8764524"/>
-            <a:ext cx="10180015" cy="850392"/>
+            <a:off x="1371600" y="8654796"/>
+            <a:ext cx="10180015" cy="960120"/>
           </a:xfrm>
           <a:prstGeom prst="rect">
             <a:avLst/>
@@ -26140,7 +26261,7 @@
         <p:spPr>
           <a:xfrm>
             <a:off x="640080" y="5887822"/>
-            <a:ext cx="10911535" cy="1954073"/>
+            <a:ext cx="10911535" cy="1561795"/>
           </a:xfrm>
           <a:prstGeom prst="rect">
             <a:avLst/>
@@ -26204,7 +26325,7 @@
         <p:spPr>
           <a:xfrm>
             <a:off x="914400" y="6527902"/>
-            <a:ext cx="10362895" cy="1176833"/>
+            <a:ext cx="10362895" cy="784555"/>
           </a:xfrm>
           <a:prstGeom prst="rect">
             <a:avLst/>
@@ -26220,7 +26341,7 @@
               <a:buNone/>
             </a:pPr>
             <a:r>
-              <a:rPr lang="en-US" sz="2200" dirty="0">
+              <a:rPr lang="en-US" sz="2100" dirty="0">
                 <a:solidFill>
                   <a:srgbClr val="FCF9FE"/>
                 </a:solidFill>
@@ -26230,7 +26351,7 @@
               </a:rPr>
               <a:t>powershell -NoProfile -ExecutionPolicy Bypass -File "$env:USERPROFILE\.workshop-claude\setup-windows.ps1" -Doctor</a:t>
             </a:r>
-            <a:endParaRPr lang="en-US" sz="2200" dirty="0"/>
+            <a:endParaRPr lang="en-US" sz="2100" dirty="0"/>
           </a:p>
         </p:txBody>
       </p:sp>
@@ -26561,7 +26682,7 @@
         </p:nvSpPr>
         <p:spPr>
           <a:xfrm>
-            <a:off x="640080" y="2651760"/>
+            <a:off x="640080" y="2331720"/>
             <a:ext cx="8899855" cy="2377440"/>
           </a:xfrm>
           <a:prstGeom prst="rect">
@@ -26600,7 +26721,7 @@
         </p:nvSpPr>
         <p:spPr>
           <a:xfrm>
-            <a:off x="10271455" y="2697480"/>
+            <a:off x="10271455" y="2377440"/>
             <a:ext cx="1280160" cy="1280160"/>
           </a:xfrm>
           <a:prstGeom prst="ellipse">
@@ -26633,7 +26754,7 @@
         </p:blipFill>
         <p:spPr>
           <a:xfrm>
-            <a:off x="10553090" y="2979115"/>
+            <a:off x="10553090" y="2659075"/>
             <a:ext cx="716890" cy="716890"/>
           </a:xfrm>
           <a:prstGeom prst="rect">
@@ -26649,7 +26770,7 @@
         </p:nvSpPr>
         <p:spPr>
           <a:xfrm>
-            <a:off x="9539935" y="4069080"/>
+            <a:off x="9539935" y="3749040"/>
             <a:ext cx="2011680" cy="822960"/>
           </a:xfrm>
           <a:prstGeom prst="rect">
@@ -26688,7 +26809,7 @@
         </p:nvSpPr>
         <p:spPr>
           <a:xfrm>
-            <a:off x="640080" y="5303520"/>
+            <a:off x="640080" y="4892040"/>
             <a:ext cx="8899855" cy="950976"/>
           </a:xfrm>
           <a:prstGeom prst="rect">
@@ -26727,7 +26848,7 @@
         </p:nvSpPr>
         <p:spPr>
           <a:xfrm>
-            <a:off x="640080" y="6574536"/>
+            <a:off x="640080" y="6071616"/>
             <a:ext cx="10911535" cy="1561795"/>
           </a:xfrm>
           <a:prstGeom prst="rect">
@@ -26752,7 +26873,7 @@
         </p:nvSpPr>
         <p:spPr>
           <a:xfrm>
-            <a:off x="914400" y="6757416"/>
+            <a:off x="914400" y="6254496"/>
             <a:ext cx="10362895" cy="365760"/>
           </a:xfrm>
           <a:prstGeom prst="rect">
@@ -26791,7 +26912,7 @@
         </p:nvSpPr>
         <p:spPr>
           <a:xfrm>
-            <a:off x="914400" y="7214616"/>
+            <a:off x="914400" y="6711696"/>
             <a:ext cx="10362895" cy="784555"/>
           </a:xfrm>
           <a:prstGeom prst="rect">

--- a/slides/workshop-v2.pptx
+++ b/slides/workshop-v2.pptx
@@ -139,7 +139,7 @@
   <p:extLst>
     <p:ext uri="{521415D9-36F7-43E2-AB2F-B90AF26B5E84}">
       <p14:sectionLst xmlns:p14="http://schemas.microsoft.com/office/powerpoint/2010/main">
-        <p14:section name="Abertura" id="{2efcad48-a480-db2e-6f74-89515b4dd941}">
+        <p14:section name="Abertura" id="{6107c574-08dc-8f6f-84a9-69ff18e2b009}">
           <p14:sldIdLst>
             <p14:sldId id="256"/>
             <p14:sldId id="257"/>
@@ -150,7 +150,7 @@
             <p14:sldId id="262"/>
           </p14:sldIdLst>
         </p14:section>
-        <p14:section name="Missões" id="{c404a494-2f63-d457-a063-07c2295a6325}">
+        <p14:section name="Missões" id="{6545fdde-9a85-c6dd-9fc6-b10264fd7f16}">
           <p14:sldIdLst>
             <p14:sldId id="263"/>
             <p14:sldId id="264"/>
@@ -163,7 +163,7 @@
             <p14:sldId id="271"/>
           </p14:sldIdLst>
         </p14:section>
-        <p14:section name="Projeto 1" id="{42ea1bd8-f5bf-04dd-d1d7-b202e4ed0cb6}">
+        <p14:section name="Projeto 1" id="{9db17838-2667-2875-bc87-097dc3c70d2a}">
           <p14:sldIdLst>
             <p14:sldId id="272"/>
             <p14:sldId id="273"/>
@@ -175,7 +175,7 @@
             <p14:sldId id="279"/>
           </p14:sldIdLst>
         </p14:section>
-        <p14:section name="Projeto 2" id="{2dc5ef4b-f77a-fb27-b4b0-e4d55749f659}">
+        <p14:section name="Projeto 2" id="{bd69a559-2440-1d2f-c1de-72afa847cb21}">
           <p14:sldIdLst>
             <p14:sldId id="280"/>
             <p14:sldId id="281"/>
@@ -186,7 +186,7 @@
             <p14:sldId id="286"/>
           </p14:sldIdLst>
         </p14:section>
-        <p14:section name="Fecho" id="{5ce80b81-65cf-1b16-2427-edc03b115534}">
+        <p14:section name="Fecho" id="{dbdb4f44-c66e-e701-d036-e2520a5b32e4}">
           <p14:sldIdLst>
             <p14:sldId id="287"/>
             <p14:sldId id="288"/>

--- a/slides/workshop-v2.pptx
+++ b/slides/workshop-v2.pptx
@@ -139,7 +139,7 @@
   <p:extLst>
     <p:ext uri="{521415D9-36F7-43E2-AB2F-B90AF26B5E84}">
       <p14:sectionLst xmlns:p14="http://schemas.microsoft.com/office/powerpoint/2010/main">
-        <p14:section name="Abertura" id="{6107c574-08dc-8f6f-84a9-69ff18e2b009}">
+        <p14:section name="Abertura" id="{6c483f9c-cab7-ee66-9c6d-9c2dc25a81c9}">
           <p14:sldIdLst>
             <p14:sldId id="256"/>
             <p14:sldId id="257"/>
@@ -150,7 +150,7 @@
             <p14:sldId id="262"/>
           </p14:sldIdLst>
         </p14:section>
-        <p14:section name="Missões" id="{6545fdde-9a85-c6dd-9fc6-b10264fd7f16}">
+        <p14:section name="Missões" id="{3bfaad83-2ea6-5ab5-af8b-53a45a64dd9f}">
           <p14:sldIdLst>
             <p14:sldId id="263"/>
             <p14:sldId id="264"/>
@@ -163,7 +163,7 @@
             <p14:sldId id="271"/>
           </p14:sldIdLst>
         </p14:section>
-        <p14:section name="Projeto 1" id="{9db17838-2667-2875-bc87-097dc3c70d2a}">
+        <p14:section name="Projeto 1" id="{e6c83dee-2119-cf8e-7218-afa18e777a65}">
           <p14:sldIdLst>
             <p14:sldId id="272"/>
             <p14:sldId id="273"/>
@@ -175,7 +175,7 @@
             <p14:sldId id="279"/>
           </p14:sldIdLst>
         </p14:section>
-        <p14:section name="Projeto 2" id="{bd69a559-2440-1d2f-c1de-72afa847cb21}">
+        <p14:section name="Projeto 2" id="{ec62e5b0-b659-cb32-cb5c-36ae0be18935}">
           <p14:sldIdLst>
             <p14:sldId id="280"/>
             <p14:sldId id="281"/>
@@ -186,7 +186,7 @@
             <p14:sldId id="286"/>
           </p14:sldIdLst>
         </p14:section>
-        <p14:section name="Fecho" id="{dbdb4f44-c66e-e701-d036-e2520a5b32e4}">
+        <p14:section name="Fecho" id="{f881cd8f-91ca-68fa-c3a4-957d72483546}">
           <p14:sldIdLst>
             <p14:sldId id="287"/>
             <p14:sldId id="288"/>

--- a/slides/workshop-v2.pptx
+++ b/slides/workshop-v2.pptx
@@ -139,7 +139,7 @@
   <p:extLst>
     <p:ext uri="{521415D9-36F7-43E2-AB2F-B90AF26B5E84}">
       <p14:sectionLst xmlns:p14="http://schemas.microsoft.com/office/powerpoint/2010/main">
-        <p14:section name="Abertura" id="{6c483f9c-cab7-ee66-9c6d-9c2dc25a81c9}">
+        <p14:section name="Abertura" id="{bfa02fd6-5e16-83fa-23b6-8ef12333aafa}">
           <p14:sldIdLst>
             <p14:sldId id="256"/>
             <p14:sldId id="257"/>
@@ -150,7 +150,7 @@
             <p14:sldId id="262"/>
           </p14:sldIdLst>
         </p14:section>
-        <p14:section name="Missões" id="{3bfaad83-2ea6-5ab5-af8b-53a45a64dd9f}">
+        <p14:section name="Missões" id="{24440576-9208-a5ea-a54c-fdd2ae868648}">
           <p14:sldIdLst>
             <p14:sldId id="263"/>
             <p14:sldId id="264"/>
@@ -163,7 +163,7 @@
             <p14:sldId id="271"/>
           </p14:sldIdLst>
         </p14:section>
-        <p14:section name="Projeto 1" id="{e6c83dee-2119-cf8e-7218-afa18e777a65}">
+        <p14:section name="Projeto 1" id="{d7848e5d-19b1-0bab-5cf5-c0e0951fb15a}">
           <p14:sldIdLst>
             <p14:sldId id="272"/>
             <p14:sldId id="273"/>
@@ -175,7 +175,7 @@
             <p14:sldId id="279"/>
           </p14:sldIdLst>
         </p14:section>
-        <p14:section name="Projeto 2" id="{ec62e5b0-b659-cb32-cb5c-36ae0be18935}">
+        <p14:section name="Projeto 2" id="{c9142cb0-5d30-683f-94b5-c557a6d0c2c9}">
           <p14:sldIdLst>
             <p14:sldId id="280"/>
             <p14:sldId id="281"/>
@@ -186,7 +186,7 @@
             <p14:sldId id="286"/>
           </p14:sldIdLst>
         </p14:section>
-        <p14:section name="Fecho" id="{f881cd8f-91ca-68fa-c3a4-957d72483546}">
+        <p14:section name="Fecho" id="{2d9036e7-b16e-3f65-71e8-592f6dc7b3e6}">
           <p14:sldIdLst>
             <p14:sldId id="287"/>
             <p14:sldId id="288"/>
@@ -2161,8 +2161,8 @@
 Olha para o painel:
 - Se a M11 ficar baixa: "o Claude Code tem de estar aberto na pasta do Canivete; /mcp mostra se o servidor canivete está ligado".
 Falhas típicas e resposta:
-- O Claude não encontra a ferramenta → /mcp: o servidor canivete tem de estar ligado; reabre com claude -c
-- Responde sem chamar a tool → pede pelo nome: usa a ferramenta my-01
+- O Claude não encontra a ferramenta → /mcp: o servidor canivete tem de estar ligado. Plano B: /exit e claude -c, e volta a pedir (a sessão nova lê as ferramentas todas)
+- Responde sem chamar a tool (lê o tool.js com cat) → pede pelo nome: usa a ferramenta my-01; se continuar, /exit e claude -c
 Relógio: deves estar aqui aos 48 min.</a:t>
             </a:r>
             <a:endParaRPr lang="en-US" dirty="0"/>

--- a/slides/workshop-v2.pptx
+++ b/slides/workshop-v2.pptx
@@ -139,7 +139,7 @@
   <p:extLst>
     <p:ext uri="{521415D9-36F7-43E2-AB2F-B90AF26B5E84}">
       <p14:sectionLst xmlns:p14="http://schemas.microsoft.com/office/powerpoint/2010/main">
-        <p14:section name="Abertura" id="{bfa02fd6-5e16-83fa-23b6-8ef12333aafa}">
+        <p14:section name="Abertura" id="{3bc91770-25a8-fdd0-a645-80fd08273d9a}">
           <p14:sldIdLst>
             <p14:sldId id="256"/>
             <p14:sldId id="257"/>
@@ -150,7 +150,7 @@
             <p14:sldId id="262"/>
           </p14:sldIdLst>
         </p14:section>
-        <p14:section name="Missões" id="{24440576-9208-a5ea-a54c-fdd2ae868648}">
+        <p14:section name="Missões" id="{3b2ec00a-156d-8979-0c0c-bed2de2e25d5}">
           <p14:sldIdLst>
             <p14:sldId id="263"/>
             <p14:sldId id="264"/>
@@ -163,7 +163,7 @@
             <p14:sldId id="271"/>
           </p14:sldIdLst>
         </p14:section>
-        <p14:section name="Projeto 1" id="{d7848e5d-19b1-0bab-5cf5-c0e0951fb15a}">
+        <p14:section name="Projeto 1" id="{2fdfb9fb-5c44-d97c-2a9e-c7953a0d94b1}">
           <p14:sldIdLst>
             <p14:sldId id="272"/>
             <p14:sldId id="273"/>
@@ -175,7 +175,7 @@
             <p14:sldId id="279"/>
           </p14:sldIdLst>
         </p14:section>
-        <p14:section name="Projeto 2" id="{c9142cb0-5d30-683f-94b5-c557a6d0c2c9}">
+        <p14:section name="Projeto 2" id="{e087c122-cab0-d594-ae27-b1814493a3db}">
           <p14:sldIdLst>
             <p14:sldId id="280"/>
             <p14:sldId id="281"/>
@@ -186,7 +186,7 @@
             <p14:sldId id="286"/>
           </p14:sldIdLst>
         </p14:section>
-        <p14:section name="Fecho" id="{2d9036e7-b16e-3f65-71e8-592f6dc7b3e6}">
+        <p14:section name="Fecho" id="{e57ed098-2471-b7b8-82f1-392e4f32f665}">
           <p14:sldIdLst>
             <p14:sldId id="287"/>
             <p14:sldId id="288"/>
@@ -3410,7 +3410,7 @@
               <a:t>[5:00 → 9:00] 4 min · opening
 Objetivo: Toda a gente com o kit verificado e registada no painel.
 O que dizer:
-- O --check não instala nada: só confirma cada passo e liga-te ao painel.
+- Primeiro o workshop-register, depois o workshop-check: o check não instala nada, só confirma cada passo.
 - O registo usa o teu login do gh: confirma no teu portátil o email da empresa, e só o nome sai para o painel.
 Olha para o painel:
 - Se "Prontas" estiver abaixo de metade aos 3 min: "quem já tem a tabela verde, ajuda o vizinho".
@@ -3418,7 +3418,7 @@
 Falhas típicas e resposta:
 - E-TEL-03: o gh não pode ler os emails → gh auth refresh -h github.com -s user:email e volta a correr o register
 - E-TEL-02: sem email verificado da empresa → acrescenta-o em github.com/settings/emails; o workshop funciona sem isso
-- O comando não existe: o setup não foi feito → corre o one-liner do README agora e segue com o vizinho enquanto instala
+- command not found: workshop-register → o setup é anterior à rc.4: volta a correr o one-liner do setup, ou usa o comando longo do Teams
 Relógio: deves estar aqui aos 5 min.</a:t>
             </a:r>
             <a:endParaRPr lang="en-US" dirty="0"/>
@@ -10914,7 +10914,7 @@
                 <a:ea typeface="Courier New" pitchFamily="34" charset="-122"/>
                 <a:cs typeface="Courier New" pitchFamily="34" charset="-120"/>
               </a:rPr>
-              <a:t>node tools/gen.mjs</a:t>
+              <a:t>workshop-gen</a:t>
             </a:r>
             <a:endParaRPr lang="en-US" sz="2100" dirty="0"/>
           </a:p>
@@ -11034,7 +11034,7 @@
                 <a:ea typeface="Courier New" pitchFamily="34" charset="-122"/>
                 <a:cs typeface="Courier New" pitchFamily="34" charset="-120"/>
               </a:rPr>
-              <a:t>node tools/gen.mjs</a:t>
+              <a:t>workshop-gen</a:t>
             </a:r>
             <a:endParaRPr lang="en-US" sz="2100" dirty="0"/>
           </a:p>
@@ -14343,7 +14343,7 @@
         <p:spPr>
           <a:xfrm>
             <a:off x="640080" y="4535424"/>
-            <a:ext cx="5318608" cy="2346350"/>
+            <a:ext cx="5318608" cy="1561795"/>
           </a:xfrm>
           <a:prstGeom prst="rect">
             <a:avLst/>
@@ -14407,7 +14407,7 @@
         <p:spPr>
           <a:xfrm>
             <a:off x="914400" y="5175504"/>
-            <a:ext cx="4769968" cy="1569110"/>
+            <a:ext cx="4769968" cy="784555"/>
           </a:xfrm>
           <a:prstGeom prst="rect">
             <a:avLst/>
@@ -14446,7 +14446,7 @@
         <p:spPr>
           <a:xfrm>
             <a:off x="6233008" y="4535424"/>
-            <a:ext cx="5318608" cy="2346350"/>
+            <a:ext cx="5318608" cy="1561795"/>
           </a:xfrm>
           <a:prstGeom prst="rect">
             <a:avLst/>
@@ -14510,7 +14510,7 @@
         <p:spPr>
           <a:xfrm>
             <a:off x="6507328" y="5175504"/>
-            <a:ext cx="4769968" cy="1569110"/>
+            <a:ext cx="4769968" cy="784555"/>
           </a:xfrm>
           <a:prstGeom prst="rect">
             <a:avLst/>
@@ -14534,24 +14534,7 @@
                 <a:ea typeface="Courier New" pitchFamily="34" charset="-122"/>
                 <a:cs typeface="Courier New" pitchFamily="34" charset="-120"/>
               </a:rPr>
-              <a:t>cd ~/workshop-claude/canivete-project</a:t>
-            </a:r>
-            <a:endParaRPr lang="en-US" sz="2100" dirty="0"/>
-          </a:p>
-          <a:p>
-            <a:pPr indent="0" marL="0">
-              <a:buNone/>
-            </a:pPr>
-            <a:r>
-              <a:rPr lang="en-US" sz="2100" dirty="0">
-                <a:solidFill>
-                  <a:srgbClr val="FCF9FE"/>
-                </a:solidFill>
-                <a:latin typeface="Courier New" pitchFamily="34" charset="0"/>
-                <a:ea typeface="Courier New" pitchFamily="34" charset="-122"/>
-                <a:cs typeface="Courier New" pitchFamily="34" charset="-120"/>
-              </a:rPr>
-              <a:t>node server.js</a:t>
+              <a:t>workshop-server</a:t>
             </a:r>
             <a:endParaRPr lang="en-US" sz="2100" dirty="0"/>
           </a:p>
@@ -17789,7 +17772,7 @@
         <p:spPr>
           <a:xfrm>
             <a:off x="640080" y="7560259"/>
-            <a:ext cx="10911535" cy="1561795"/>
+            <a:ext cx="10911535" cy="1169518"/>
           </a:xfrm>
           <a:prstGeom prst="rect">
             <a:avLst/>
@@ -17853,7 +17836,7 @@
         <p:spPr>
           <a:xfrm>
             <a:off x="914400" y="8200339"/>
-            <a:ext cx="10362895" cy="784555"/>
+            <a:ext cx="10362895" cy="392278"/>
           </a:xfrm>
           <a:prstGeom prst="rect">
             <a:avLst/>
@@ -17877,24 +17860,7 @@
                 <a:ea typeface="Courier New" pitchFamily="34" charset="-122"/>
                 <a:cs typeface="Courier New" pitchFamily="34" charset="-120"/>
               </a:rPr>
-              <a:t>cd "$HOME/.workshop-claude/kit/telemetry"</a:t>
-            </a:r>
-            <a:endParaRPr lang="en-US" sz="2200" dirty="0"/>
-          </a:p>
-          <a:p>
-            <a:pPr indent="0" marL="0">
-              <a:buNone/>
-            </a:pPr>
-            <a:r>
-              <a:rPr lang="en-US" sz="2200" dirty="0">
-                <a:solidFill>
-                  <a:srgbClr val="FCF9FE"/>
-                </a:solidFill>
-                <a:latin typeface="Courier New" pitchFamily="34" charset="0"/>
-                <a:ea typeface="Courier New" pitchFamily="34" charset="-122"/>
-                <a:cs typeface="Courier New" pitchFamily="34" charset="-120"/>
-              </a:rPr>
-              <a:t>node ctl.mjs unregister</a:t>
+              <a:t>workshop-unregister</a:t>
             </a:r>
             <a:endParaRPr lang="en-US" sz="2200" dirty="0"/>
           </a:p>
@@ -20199,7 +20165,7 @@
         <p:spPr>
           <a:xfrm>
             <a:off x="640080" y="4535424"/>
-            <a:ext cx="10911535" cy="1169518"/>
+            <a:ext cx="5318608" cy="1169518"/>
           </a:xfrm>
           <a:prstGeom prst="rect">
             <a:avLst/>
@@ -20224,7 +20190,7 @@
         <p:spPr>
           <a:xfrm>
             <a:off x="914400" y="4718304"/>
-            <a:ext cx="10362895" cy="365760"/>
+            <a:ext cx="4769968" cy="365760"/>
           </a:xfrm>
           <a:prstGeom prst="rect">
             <a:avLst/>
@@ -20263,7 +20229,7 @@
         <p:spPr>
           <a:xfrm>
             <a:off x="914400" y="5175504"/>
-            <a:ext cx="10362895" cy="392278"/>
+            <a:ext cx="4769968" cy="392278"/>
           </a:xfrm>
           <a:prstGeom prst="rect">
             <a:avLst/>
@@ -20301,8 +20267,8 @@
         </p:nvSpPr>
         <p:spPr>
           <a:xfrm>
-            <a:off x="640080" y="5887822"/>
-            <a:ext cx="10911535" cy="1169518"/>
+            <a:off x="6233008" y="4535424"/>
+            <a:ext cx="5318608" cy="1169518"/>
           </a:xfrm>
           <a:prstGeom prst="rect">
             <a:avLst/>
@@ -20326,8 +20292,8 @@
         </p:nvSpPr>
         <p:spPr>
           <a:xfrm>
-            <a:off x="914400" y="6070702"/>
-            <a:ext cx="10362895" cy="365760"/>
+            <a:off x="6507328" y="4718304"/>
+            <a:ext cx="4769968" cy="365760"/>
           </a:xfrm>
           <a:prstGeom prst="rect">
             <a:avLst/>
@@ -20365,8 +20331,8 @@
         </p:nvSpPr>
         <p:spPr>
           <a:xfrm>
-            <a:off x="914400" y="6527902"/>
-            <a:ext cx="10362895" cy="392278"/>
+            <a:off x="6507328" y="5175504"/>
+            <a:ext cx="4769968" cy="392278"/>
           </a:xfrm>
           <a:prstGeom prst="rect">
             <a:avLst/>
@@ -20390,7 +20356,7 @@
                 <a:ea typeface="Courier New" pitchFamily="34" charset="-122"/>
                 <a:cs typeface="Courier New" pitchFamily="34" charset="-120"/>
               </a:rPr>
-              <a:t>node "$HOME/.workshop-claude/kit/orchestrator/dashboard.mjs"</a:t>
+              <a:t>workshop-dashboard</a:t>
             </a:r>
             <a:endParaRPr lang="en-US" sz="2100" dirty="0"/>
           </a:p>
@@ -26061,7 +26027,7 @@
                 <a:ea typeface="Arial" pitchFamily="34" charset="-122"/>
                 <a:cs typeface="Arial" pitchFamily="34" charset="-120"/>
               </a:rPr>
-              <a:t>Num terminal, corre o comando do teu sistema</a:t>
+              <a:t>Num terminal, liga-te ao painel e depois verifica o kit</a:t>
             </a:r>
             <a:endParaRPr lang="en-US" sz="2600" dirty="0"/>
           </a:p>
@@ -26160,7 +26126,7 @@
         <p:spPr>
           <a:xfrm>
             <a:off x="640080" y="3877056"/>
-            <a:ext cx="10911535" cy="1169518"/>
+            <a:ext cx="5318608" cy="1169518"/>
           </a:xfrm>
           <a:prstGeom prst="rect">
             <a:avLst/>
@@ -26185,7 +26151,7 @@
         <p:spPr>
           <a:xfrm>
             <a:off x="914400" y="4059936"/>
-            <a:ext cx="10362895" cy="365760"/>
+            <a:ext cx="4769968" cy="365760"/>
           </a:xfrm>
           <a:prstGeom prst="rect">
             <a:avLst/>
@@ -26209,7 +26175,7 @@
                 <a:ea typeface="Arial" pitchFamily="34" charset="-122"/>
                 <a:cs typeface="Arial" pitchFamily="34" charset="-120"/>
               </a:rPr>
-              <a:t>Mac</a:t>
+              <a:t>1 · Liga-te ao painel (Mac e Windows)</a:t>
             </a:r>
             <a:endParaRPr lang="en-US" sz="2000" dirty="0"/>
           </a:p>
@@ -26224,7 +26190,7 @@
         <p:spPr>
           <a:xfrm>
             <a:off x="914400" y="4517136"/>
-            <a:ext cx="10362895" cy="392278"/>
+            <a:ext cx="4769968" cy="392278"/>
           </a:xfrm>
           <a:prstGeom prst="rect">
             <a:avLst/>
@@ -26248,7 +26214,7 @@
                 <a:ea typeface="Courier New" pitchFamily="34" charset="-122"/>
                 <a:cs typeface="Courier New" pitchFamily="34" charset="-120"/>
               </a:rPr>
-              <a:t>bash ~/.workshop-claude/setup-mac.sh --check</a:t>
+              <a:t>workshop-register</a:t>
             </a:r>
             <a:endParaRPr lang="en-US" sz="2100" dirty="0"/>
           </a:p>
@@ -26262,8 +26228,8 @@
         </p:nvSpPr>
         <p:spPr>
           <a:xfrm>
-            <a:off x="640080" y="5229454"/>
-            <a:ext cx="10911535" cy="1561795"/>
+            <a:off x="6233008" y="3877056"/>
+            <a:ext cx="5318608" cy="1169518"/>
           </a:xfrm>
           <a:prstGeom prst="rect">
             <a:avLst/>
@@ -26287,8 +26253,8 @@
         </p:nvSpPr>
         <p:spPr>
           <a:xfrm>
-            <a:off x="914400" y="5412334"/>
-            <a:ext cx="10362895" cy="365760"/>
+            <a:off x="6507328" y="4059936"/>
+            <a:ext cx="4769968" cy="365760"/>
           </a:xfrm>
           <a:prstGeom prst="rect">
             <a:avLst/>
@@ -26312,7 +26278,7 @@
                 <a:ea typeface="Arial" pitchFamily="34" charset="-122"/>
                 <a:cs typeface="Arial" pitchFamily="34" charset="-120"/>
               </a:rPr>
-              <a:t>Windows (PowerShell)</a:t>
+              <a:t>2 · Verifica o kit (Mac e Windows)</a:t>
             </a:r>
             <a:endParaRPr lang="en-US" sz="2000" dirty="0"/>
           </a:p>
@@ -26326,8 +26292,8 @@
         </p:nvSpPr>
         <p:spPr>
           <a:xfrm>
-            <a:off x="914400" y="5869534"/>
-            <a:ext cx="10362895" cy="784555"/>
+            <a:off x="6507328" y="4517136"/>
+            <a:ext cx="4769968" cy="392278"/>
           </a:xfrm>
           <a:prstGeom prst="rect">
             <a:avLst/>
@@ -26351,7 +26317,7 @@
                 <a:ea typeface="Courier New" pitchFamily="34" charset="-122"/>
                 <a:cs typeface="Courier New" pitchFamily="34" charset="-120"/>
               </a:rPr>
-              <a:t>powershell -NoProfile -ExecutionPolicy Bypass -File "$env:USERPROFILE\.workshop-claude\setup-windows.ps1" -Check</a:t>
+              <a:t>workshop-check</a:t>
             </a:r>
             <a:endParaRPr lang="en-US" sz="2100" dirty="0"/>
           </a:p>
@@ -26359,110 +26325,7 @@
       </p:sp>
       <p:sp>
         <p:nvSpPr>
-          <p:cNvPr id="16" name="code-background"/>
-          <p:cNvSpPr/>
-          <p:nvPr/>
-        </p:nvSpPr>
-        <p:spPr>
-          <a:xfrm>
-            <a:off x="640080" y="6974129"/>
-            <a:ext cx="10911535" cy="1169518"/>
-          </a:xfrm>
-          <a:prstGeom prst="rect">
-            <a:avLst/>
-          </a:prstGeom>
-          <a:solidFill>
-            <a:srgbClr val="140920"/>
-          </a:solidFill>
-          <a:ln w="12700">
-            <a:solidFill>
-              <a:srgbClr val="140920"/>
-            </a:solidFill>
-            <a:prstDash val="solid"/>
-          </a:ln>
-        </p:spPr>
-      </p:sp>
-      <p:sp>
-        <p:nvSpPr>
-          <p:cNvPr id="17" name="code-label"/>
-          <p:cNvSpPr txBox="1"/>
-          <p:nvPr/>
-        </p:nvSpPr>
-        <p:spPr>
-          <a:xfrm>
-            <a:off x="914400" y="7157009"/>
-            <a:ext cx="10362895" cy="365760"/>
-          </a:xfrm>
-          <a:prstGeom prst="rect">
-            <a:avLst/>
-          </a:prstGeom>
-          <a:noFill/>
-          <a:ln/>
-        </p:spPr>
-        <p:txBody>
-          <a:bodyPr wrap="square" lIns="0" tIns="0" rIns="0" bIns="0" rtlCol="0" anchor="t"/>
-          <a:lstStyle/>
-          <a:p>
-            <a:pPr indent="0" marL="0">
-              <a:buNone/>
-            </a:pPr>
-            <a:r>
-              <a:rPr lang="en-US" sz="2000" b="1" dirty="0">
-                <a:solidFill>
-                  <a:srgbClr val="93A7FF"/>
-                </a:solidFill>
-                <a:latin typeface="Arial" pitchFamily="34" charset="0"/>
-                <a:ea typeface="Arial" pitchFamily="34" charset="-122"/>
-                <a:cs typeface="Arial" pitchFamily="34" charset="-120"/>
-              </a:rPr>
-              <a:t>Não estás no painel?</a:t>
-            </a:r>
-            <a:endParaRPr lang="en-US" sz="2000" dirty="0"/>
-          </a:p>
-        </p:txBody>
-      </p:sp>
-      <p:sp>
-        <p:nvSpPr>
-          <p:cNvPr id="18" name="code"/>
-          <p:cNvSpPr txBox="1"/>
-          <p:nvPr/>
-        </p:nvSpPr>
-        <p:spPr>
-          <a:xfrm>
-            <a:off x="914400" y="7614209"/>
-            <a:ext cx="10362895" cy="392278"/>
-          </a:xfrm>
-          <a:prstGeom prst="rect">
-            <a:avLst/>
-          </a:prstGeom>
-          <a:noFill/>
-          <a:ln/>
-        </p:spPr>
-        <p:txBody>
-          <a:bodyPr wrap="square" lIns="0" tIns="0" rIns="0" bIns="0" rtlCol="0" anchor="t"/>
-          <a:lstStyle/>
-          <a:p>
-            <a:pPr indent="0" marL="0">
-              <a:buNone/>
-            </a:pPr>
-            <a:r>
-              <a:rPr lang="en-US" sz="2100" dirty="0">
-                <a:solidFill>
-                  <a:srgbClr val="FCF9FE"/>
-                </a:solidFill>
-                <a:latin typeface="Courier New" pitchFamily="34" charset="0"/>
-                <a:ea typeface="Courier New" pitchFamily="34" charset="-122"/>
-                <a:cs typeface="Courier New" pitchFamily="34" charset="-120"/>
-              </a:rPr>
-              <a:t>node "$HOME/.workshop-claude/kit/telemetry/ctl.mjs" register</a:t>
-            </a:r>
-            <a:endParaRPr lang="en-US" sz="2100" dirty="0"/>
-          </a:p>
-        </p:txBody>
-      </p:sp>
-      <p:sp>
-        <p:nvSpPr>
-          <p:cNvPr id="19" name="expected-mark-circle"/>
+          <p:cNvPr id="16" name="expected-mark-circle"/>
           <p:cNvSpPr/>
           <p:nvPr/>
         </p:nvSpPr>
@@ -26487,7 +26350,7 @@
       </p:sp>
       <p:pic>
         <p:nvPicPr>
-          <p:cNvPr id="20" name="expected-mark" descr="check">    </p:cNvPr>
+          <p:cNvPr id="17" name="expected-mark" descr="check">    </p:cNvPr>
           <p:cNvPicPr>
             <a:picLocks noChangeAspect="1"/>
           </p:cNvPicPr>
@@ -26511,7 +26374,7 @@
       </p:pic>
       <p:sp>
         <p:nvSpPr>
-          <p:cNvPr id="21" name="expected"/>
+          <p:cNvPr id="18" name="expected"/>
           <p:cNvSpPr txBox="1"/>
           <p:nvPr/>
         </p:nvSpPr>
@@ -26857,7 +26720,7 @@
                 <a:ea typeface="Arial" pitchFamily="34" charset="-122"/>
                 <a:cs typeface="Arial" pitchFamily="34" charset="-120"/>
               </a:rPr>
-              <a:t>Corre o --doctor do teu sistema</a:t>
+              <a:t>Corre o diagnóstico</a:t>
             </a:r>
             <a:endParaRPr lang="en-US" sz="2600" dirty="0"/>
           </a:p>
@@ -27089,7 +26952,7 @@
                 <a:ea typeface="Arial" pitchFamily="34" charset="-122"/>
                 <a:cs typeface="Arial" pitchFamily="34" charset="-120"/>
               </a:rPr>
-              <a:t>Mac</a:t>
+              <a:t>Mac e Windows</a:t>
             </a:r>
             <a:endParaRPr lang="en-US" sz="2000" dirty="0"/>
           </a:p>
@@ -27128,7 +26991,7 @@
                 <a:ea typeface="Courier New" pitchFamily="34" charset="-122"/>
                 <a:cs typeface="Courier New" pitchFamily="34" charset="-120"/>
               </a:rPr>
-              <a:t>bash ~/.workshop-claude/setup-mac.sh --doctor</a:t>
+              <a:t>workshop-doctor</a:t>
             </a:r>
             <a:endParaRPr lang="en-US" sz="2100" dirty="0"/>
           </a:p>
@@ -27136,110 +26999,7 @@
       </p:sp>
       <p:sp>
         <p:nvSpPr>
-          <p:cNvPr id="15" name="code-background"/>
-          <p:cNvSpPr/>
-          <p:nvPr/>
-        </p:nvSpPr>
-        <p:spPr>
-          <a:xfrm>
-            <a:off x="640080" y="5887822"/>
-            <a:ext cx="10911535" cy="1561795"/>
-          </a:xfrm>
-          <a:prstGeom prst="rect">
-            <a:avLst/>
-          </a:prstGeom>
-          <a:solidFill>
-            <a:srgbClr val="140920"/>
-          </a:solidFill>
-          <a:ln w="12700">
-            <a:solidFill>
-              <a:srgbClr val="140920"/>
-            </a:solidFill>
-            <a:prstDash val="solid"/>
-          </a:ln>
-        </p:spPr>
-      </p:sp>
-      <p:sp>
-        <p:nvSpPr>
-          <p:cNvPr id="16" name="code-label"/>
-          <p:cNvSpPr txBox="1"/>
-          <p:nvPr/>
-        </p:nvSpPr>
-        <p:spPr>
-          <a:xfrm>
-            <a:off x="914400" y="6070702"/>
-            <a:ext cx="10362895" cy="365760"/>
-          </a:xfrm>
-          <a:prstGeom prst="rect">
-            <a:avLst/>
-          </a:prstGeom>
-          <a:noFill/>
-          <a:ln/>
-        </p:spPr>
-        <p:txBody>
-          <a:bodyPr wrap="square" lIns="0" tIns="0" rIns="0" bIns="0" rtlCol="0" anchor="t"/>
-          <a:lstStyle/>
-          <a:p>
-            <a:pPr indent="0" marL="0">
-              <a:buNone/>
-            </a:pPr>
-            <a:r>
-              <a:rPr lang="en-US" sz="2000" b="1" dirty="0">
-                <a:solidFill>
-                  <a:srgbClr val="93A7FF"/>
-                </a:solidFill>
-                <a:latin typeface="Arial" pitchFamily="34" charset="0"/>
-                <a:ea typeface="Arial" pitchFamily="34" charset="-122"/>
-                <a:cs typeface="Arial" pitchFamily="34" charset="-120"/>
-              </a:rPr>
-              <a:t>Windows (PowerShell)</a:t>
-            </a:r>
-            <a:endParaRPr lang="en-US" sz="2000" dirty="0"/>
-          </a:p>
-        </p:txBody>
-      </p:sp>
-      <p:sp>
-        <p:nvSpPr>
-          <p:cNvPr id="17" name="code"/>
-          <p:cNvSpPr txBox="1"/>
-          <p:nvPr/>
-        </p:nvSpPr>
-        <p:spPr>
-          <a:xfrm>
-            <a:off x="914400" y="6527902"/>
-            <a:ext cx="10362895" cy="784555"/>
-          </a:xfrm>
-          <a:prstGeom prst="rect">
-            <a:avLst/>
-          </a:prstGeom>
-          <a:noFill/>
-          <a:ln/>
-        </p:spPr>
-        <p:txBody>
-          <a:bodyPr wrap="square" lIns="0" tIns="0" rIns="0" bIns="0" rtlCol="0" anchor="t"/>
-          <a:lstStyle/>
-          <a:p>
-            <a:pPr indent="0" marL="0">
-              <a:buNone/>
-            </a:pPr>
-            <a:r>
-              <a:rPr lang="en-US" sz="2100" dirty="0">
-                <a:solidFill>
-                  <a:srgbClr val="FCF9FE"/>
-                </a:solidFill>
-                <a:latin typeface="Courier New" pitchFamily="34" charset="0"/>
-                <a:ea typeface="Courier New" pitchFamily="34" charset="-122"/>
-                <a:cs typeface="Courier New" pitchFamily="34" charset="-120"/>
-              </a:rPr>
-              <a:t>powershell -NoProfile -ExecutionPolicy Bypass -File "$env:USERPROFILE\.workshop-claude\setup-windows.ps1" -Doctor</a:t>
-            </a:r>
-            <a:endParaRPr lang="en-US" sz="2100" dirty="0"/>
-          </a:p>
-        </p:txBody>
-      </p:sp>
-      <p:sp>
-        <p:nvSpPr>
-          <p:cNvPr id="18" name="expected-mark-circle"/>
+          <p:cNvPr id="15" name="expected-mark-circle"/>
           <p:cNvSpPr/>
           <p:nvPr/>
         </p:nvSpPr>
@@ -27264,7 +27024,7 @@
       </p:sp>
       <p:pic>
         <p:nvPicPr>
-          <p:cNvPr id="19" name="expected-mark" descr="check">    </p:cNvPr>
+          <p:cNvPr id="16" name="expected-mark" descr="check">    </p:cNvPr>
           <p:cNvPicPr>
             <a:picLocks noChangeAspect="1"/>
           </p:cNvPicPr>
@@ -27288,7 +27048,7 @@
       </p:pic>
       <p:sp>
         <p:nvSpPr>
-          <p:cNvPr id="20" name="expected"/>
+          <p:cNvPr id="17" name="expected"/>
           <p:cNvSpPr txBox="1"/>
           <p:nvPr/>
         </p:nvSpPr>

--- a/slides/workshop-v2.pptx
+++ b/slides/workshop-v2.pptx
@@ -139,7 +139,7 @@
   <p:extLst>
     <p:ext uri="{521415D9-36F7-43E2-AB2F-B90AF26B5E84}">
       <p14:sectionLst xmlns:p14="http://schemas.microsoft.com/office/powerpoint/2010/main">
-        <p14:section name="Abertura" id="{3bc91770-25a8-fdd0-a645-80fd08273d9a}">
+        <p14:section name="Abertura" id="{8a95f5ac-a923-1cd0-36f0-d7af3325b30a}">
           <p14:sldIdLst>
             <p14:sldId id="256"/>
             <p14:sldId id="257"/>
@@ -150,7 +150,7 @@
             <p14:sldId id="262"/>
           </p14:sldIdLst>
         </p14:section>
-        <p14:section name="Missões" id="{3b2ec00a-156d-8979-0c0c-bed2de2e25d5}">
+        <p14:section name="Missões" id="{2f9fd624-d083-d6db-65f7-c6dba7e97e76}">
           <p14:sldIdLst>
             <p14:sldId id="263"/>
             <p14:sldId id="264"/>
@@ -163,7 +163,7 @@
             <p14:sldId id="271"/>
           </p14:sldIdLst>
         </p14:section>
-        <p14:section name="Projeto 1" id="{2fdfb9fb-5c44-d97c-2a9e-c7953a0d94b1}">
+        <p14:section name="Projeto 1" id="{f022826d-7f5c-f633-a30b-fd5edfafd15e}">
           <p14:sldIdLst>
             <p14:sldId id="272"/>
             <p14:sldId id="273"/>
@@ -175,7 +175,7 @@
             <p14:sldId id="279"/>
           </p14:sldIdLst>
         </p14:section>
-        <p14:section name="Projeto 2" id="{e087c122-cab0-d594-ae27-b1814493a3db}">
+        <p14:section name="Projeto 2" id="{4df67c99-f64d-5867-cbfb-c1b08b49d4ac}">
           <p14:sldIdLst>
             <p14:sldId id="280"/>
             <p14:sldId id="281"/>
@@ -186,7 +186,7 @@
             <p14:sldId id="286"/>
           </p14:sldIdLst>
         </p14:section>
-        <p14:section name="Fecho" id="{e57ed098-2471-b7b8-82f1-392e4f32f665}">
+        <p14:section name="Fecho" id="{9b3a1830-1dc1-1ac1-7eee-9fcee2c33fc7}">
           <p14:sldIdLst>
             <p14:sldId id="287"/>
             <p14:sldId id="288"/>
@@ -24197,6 +24197,133 @@
                 <a:cs typeface="Arial" pitchFamily="34" charset="-120"/>
               </a:rPr>
               <a:t>https://github.com/cx-guilherme-pinto/workshop-claude</a:t>
+            </a:r>
+            <a:endParaRPr lang="en-US" sz="2400" dirty="0"/>
+          </a:p>
+        </p:txBody>
+      </p:sp>
+      <p:sp>
+        <p:nvSpPr>
+          <p:cNvPr id="5" name="feedback-card"/>
+          <p:cNvSpPr/>
+          <p:nvPr/>
+        </p:nvSpPr>
+        <p:spPr>
+          <a:xfrm>
+            <a:off x="2735428" y="548640"/>
+            <a:ext cx="2377440" cy="2377440"/>
+          </a:xfrm>
+          <a:prstGeom prst="rect">
+            <a:avLst/>
+          </a:prstGeom>
+          <a:solidFill>
+            <a:srgbClr val="FFFFFF"/>
+          </a:solidFill>
+          <a:ln w="12700">
+            <a:solidFill>
+              <a:srgbClr val="FFFFFF"/>
+            </a:solidFill>
+            <a:prstDash val="solid"/>
+          </a:ln>
+        </p:spPr>
+      </p:sp>
+      <p:pic>
+        <p:nvPicPr>
+          <p:cNvPr id="6" name="feedback-qr" descr="https://forms.cloud.microsoft/r/qMtc41Gg32">    </p:cNvPr>
+          <p:cNvPicPr>
+            <a:picLocks noChangeAspect="1"/>
+          </p:cNvPicPr>
+          <p:nvPr/>
+        </p:nvPicPr>
+        <p:blipFill>
+          <a:blip r:embed="rId1"/>
+          <a:stretch>
+            <a:fillRect/>
+          </a:stretch>
+        </p:blipFill>
+        <p:spPr>
+          <a:xfrm>
+            <a:off x="2872588" y="685800"/>
+            <a:ext cx="2103120" cy="2103120"/>
+          </a:xfrm>
+          <a:prstGeom prst="rect">
+            <a:avLst/>
+          </a:prstGeom>
+        </p:spPr>
+      </p:pic>
+      <p:sp>
+        <p:nvSpPr>
+          <p:cNvPr id="7" name="feedback-label"/>
+          <p:cNvSpPr txBox="1"/>
+          <p:nvPr/>
+        </p:nvSpPr>
+        <p:spPr>
+          <a:xfrm>
+            <a:off x="5432908" y="1051560"/>
+            <a:ext cx="4023360" cy="594360"/>
+          </a:xfrm>
+          <a:prstGeom prst="rect">
+            <a:avLst/>
+          </a:prstGeom>
+          <a:noFill/>
+          <a:ln/>
+        </p:spPr>
+        <p:txBody>
+          <a:bodyPr wrap="none" lIns="0" tIns="0" rIns="0" bIns="0" rtlCol="0" anchor="t"/>
+          <a:lstStyle/>
+          <a:p>
+            <a:pPr indent="0" marL="0">
+              <a:buNone/>
+            </a:pPr>
+            <a:r>
+              <a:rPr lang="en-US" sz="3200" b="1" dirty="0">
+                <a:solidFill>
+                  <a:srgbClr val="F25928"/>
+                </a:solidFill>
+                <a:latin typeface="Founders Grotesk Medium" pitchFamily="34" charset="0"/>
+                <a:ea typeface="Founders Grotesk Medium" pitchFamily="34" charset="-122"/>
+                <a:cs typeface="Founders Grotesk Medium" pitchFamily="34" charset="-120"/>
+              </a:rPr>
+              <a:t>Avalia o workshop</a:t>
+            </a:r>
+            <a:endParaRPr lang="en-US" sz="3200" dirty="0"/>
+          </a:p>
+        </p:txBody>
+      </p:sp>
+      <p:sp>
+        <p:nvSpPr>
+          <p:cNvPr id="8" name="feedback-url"/>
+          <p:cNvSpPr txBox="1"/>
+          <p:nvPr/>
+        </p:nvSpPr>
+        <p:spPr>
+          <a:xfrm>
+            <a:off x="5432908" y="1737360"/>
+            <a:ext cx="4572000" cy="457200"/>
+          </a:xfrm>
+          <a:prstGeom prst="rect">
+            <a:avLst/>
+          </a:prstGeom>
+          <a:noFill/>
+          <a:ln/>
+        </p:spPr>
+        <p:txBody>
+          <a:bodyPr wrap="none" lIns="0" tIns="0" rIns="0" bIns="0" rtlCol="0" anchor="t"/>
+          <a:lstStyle/>
+          <a:p>
+            <a:pPr indent="0" marL="0">
+              <a:buNone/>
+            </a:pPr>
+            <a:r>
+              <a:rPr lang="en-US" sz="2400" dirty="0">
+                <a:solidFill>
+                  <a:srgbClr val="B9AEDB"/>
+                </a:solidFill>
+                <a:latin typeface="Arial" pitchFamily="34" charset="0"/>
+                <a:ea typeface="Arial" pitchFamily="34" charset="-122"/>
+                <a:cs typeface="Arial" pitchFamily="34" charset="-120"/>
+              </a:rPr>
+              <a:t>forms.cloud.microsoft/r/qMtc41Gg32</a:t>
             </a:r>
             <a:endParaRPr lang="en-US" sz="2400" dirty="0"/>
           </a:p>
